--- a/loop-on-issue-intro.pptx
+++ b/loop-on-issue-intro.pptx
@@ -1262,20 +1262,20 @@
       <p:grpSpPr/>
       <p:sp>
         <p:nvSpPr>
-          <p:cNvPr id="100009" name="Band"/>
+          <p:cNvPr id="100057" name="Band2"/>
           <p:cNvSpPr/>
           <p:nvPr/>
         </p:nvSpPr>
         <p:spPr>
           <a:xfrm xmlns:a="http://schemas.openxmlformats.org/drawingml/2006/main">
-            <a:off x="0" y="0"/>
-            <a:ext cx="198000" cy="6858000"/>
+            <a:off x="792000" y="5292000"/>
+            <a:ext cx="10861200" cy="972000"/>
           </a:xfrm>
           <a:prstGeom xmlns:a="http://schemas.openxmlformats.org/drawingml/2006/main" prst="rect">
             <a:avLst/>
           </a:prstGeom>
           <a:solidFill xmlns:a="http://schemas.openxmlformats.org/drawingml/2006/main">
-            <a:srgbClr val="02C39A"/>
+            <a:srgbClr val="F1F5F8"/>
           </a:solidFill>
           <a:ln xmlns:a="http://schemas.openxmlformats.org/drawingml/2006/main">
             <a:noFill/>
@@ -1971,27 +1971,27 @@
         </p:nvSpPr>
         <p:spPr>
           <a:xfrm xmlns:a="http://schemas.openxmlformats.org/drawingml/2006/main">
-            <a:off x="792000" y="5436000"/>
-            <a:ext cx="7200000" cy="324000"/>
-          </a:xfrm>
-          <a:prstGeom xmlns:a="http://schemas.openxmlformats.org/drawingml/2006/main" prst="rect">
-            <a:avLst/>
-          </a:prstGeom>
-          <a:noFill xmlns:a="http://schemas.openxmlformats.org/drawingml/2006/main"/>
-        </p:spPr>
-        <p:txBody>
-          <a:bodyPr xmlns:a="http://schemas.openxmlformats.org/drawingml/2006/main"/>
-          <a:lstStyle xmlns:a="http://schemas.openxmlformats.org/drawingml/2006/main"/>
-          <a:p xmlns:a="http://schemas.openxmlformats.org/drawingml/2006/main">
-            <a:r>
-              <a:rPr lang="en-US" sz="1400">
-                <a:solidFill>
-                  <a:srgbClr val="6B8FAA"/>
+            <a:off x="792000" y="3924000"/>
+            <a:ext cx="4212000" cy="1080000"/>
+          </a:xfrm>
+          <a:prstGeom xmlns:a="http://schemas.openxmlformats.org/drawingml/2006/main" prst="rect">
+            <a:avLst/>
+          </a:prstGeom>
+          <a:noFill xmlns:a="http://schemas.openxmlformats.org/drawingml/2006/main"/>
+        </p:spPr>
+        <p:txBody>
+          <a:bodyPr xmlns:a="http://schemas.openxmlformats.org/drawingml/2006/main"/>
+          <a:lstStyle xmlns:a="http://schemas.openxmlformats.org/drawingml/2006/main"/>
+          <a:p xmlns:a="http://schemas.openxmlformats.org/drawingml/2006/main">
+            <a:r>
+              <a:rPr lang="en-US" sz="1800">
+                <a:solidFill>
+                  <a:srgbClr val="4E6E88"/>
                 </a:solidFill>
                 <a:latin typeface="Consolas"/>
                 <a:ea typeface="Microsoft YaHei"/>
               </a:rPr>
-              <a:t>另有 [SKIP]：确认不需要改代码时才走，而且必须写明理由。</a:t>
+              <a:t>另有 [SKIP]：确认这个 issue 不需要改代码时才走，而且必须写明理由。</a:t>
             </a:r>
           </a:p>
         </p:txBody>
@@ -2122,6 +2122,213 @@
           </a:ln>
         </p:spPr>
       </p:cxnSp>
+      <p:sp>
+        <p:nvSpPr>
+          <p:cNvPr id="100058" name="TextBox 25"/>
+          <p:cNvSpPr/>
+          <p:nvPr/>
+        </p:nvSpPr>
+        <p:spPr>
+          <a:xfrm xmlns:a="http://schemas.openxmlformats.org/drawingml/2006/main">
+            <a:off x="1044000" y="5526000"/>
+            <a:ext cx="93600" cy="93600"/>
+          </a:xfrm>
+          <a:prstGeom xmlns:a="http://schemas.openxmlformats.org/drawingml/2006/main" prst="rect">
+            <a:avLst/>
+          </a:prstGeom>
+          <a:solidFill xmlns:a="http://schemas.openxmlformats.org/drawingml/2006/main">
+            <a:srgbClr val="02C39A"/>
+          </a:solidFill>
+          <a:ln xmlns:a="http://schemas.openxmlformats.org/drawingml/2006/main">
+            <a:noFill/>
+          </a:ln>
+        </p:spPr>
+        <p:txBody>
+          <a:bodyPr xmlns:a="http://schemas.openxmlformats.org/drawingml/2006/main"/>
+          <a:lstStyle xmlns:a="http://schemas.openxmlformats.org/drawingml/2006/main"/>
+          <a:p xmlns:a="http://schemas.openxmlformats.org/drawingml/2006/main"/>
+        </p:txBody>
+      </p:sp>
+      <p:sp>
+        <p:nvSpPr>
+          <p:cNvPr id="100059" name="TextBox 26"/>
+          <p:cNvSpPr txBox="1"/>
+          <p:nvPr/>
+        </p:nvSpPr>
+        <p:spPr>
+          <a:xfrm xmlns:a="http://schemas.openxmlformats.org/drawingml/2006/main">
+            <a:off x="1242000" y="5454000"/>
+            <a:ext cx="3060000" cy="684000"/>
+          </a:xfrm>
+          <a:prstGeom xmlns:a="http://schemas.openxmlformats.org/drawingml/2006/main" prst="rect">
+            <a:avLst/>
+          </a:prstGeom>
+          <a:noFill xmlns:a="http://schemas.openxmlformats.org/drawingml/2006/main"/>
+        </p:spPr>
+        <p:txBody>
+          <a:bodyPr xmlns:a="http://schemas.openxmlformats.org/drawingml/2006/main"/>
+          <a:lstStyle xmlns:a="http://schemas.openxmlformats.org/drawingml/2006/main"/>
+          <a:p xmlns:a="http://schemas.openxmlformats.org/drawingml/2006/main">
+            <a:r>
+              <a:rPr lang="en-US" sz="1800">
+                <a:solidFill>
+                  <a:srgbClr val="2B3A4E"/>
+                </a:solidFill>
+                <a:latin typeface="Calibri"/>
+                <a:ea typeface="Microsoft YaHei"/>
+              </a:rPr>
+              <a:t>每个 issue 一个独立 worktree，默认最多 2 个并行</a:t>
+            </a:r>
+          </a:p>
+        </p:txBody>
+      </p:sp>
+      <p:sp>
+        <p:nvSpPr>
+          <p:cNvPr id="100060" name="TextBox 27"/>
+          <p:cNvSpPr/>
+          <p:nvPr/>
+        </p:nvSpPr>
+        <p:spPr>
+          <a:xfrm xmlns:a="http://schemas.openxmlformats.org/drawingml/2006/main">
+            <a:off x="4593600" y="5526000"/>
+            <a:ext cx="93600" cy="93600"/>
+          </a:xfrm>
+          <a:prstGeom xmlns:a="http://schemas.openxmlformats.org/drawingml/2006/main" prst="rect">
+            <a:avLst/>
+          </a:prstGeom>
+          <a:solidFill xmlns:a="http://schemas.openxmlformats.org/drawingml/2006/main">
+            <a:srgbClr val="02C39A"/>
+          </a:solidFill>
+          <a:ln xmlns:a="http://schemas.openxmlformats.org/drawingml/2006/main">
+            <a:noFill/>
+          </a:ln>
+        </p:spPr>
+        <p:txBody>
+          <a:bodyPr xmlns:a="http://schemas.openxmlformats.org/drawingml/2006/main"/>
+          <a:lstStyle xmlns:a="http://schemas.openxmlformats.org/drawingml/2006/main"/>
+          <a:p xmlns:a="http://schemas.openxmlformats.org/drawingml/2006/main"/>
+        </p:txBody>
+      </p:sp>
+      <p:sp>
+        <p:nvSpPr>
+          <p:cNvPr id="100061" name="TextBox 28"/>
+          <p:cNvSpPr txBox="1"/>
+          <p:nvPr/>
+        </p:nvSpPr>
+        <p:spPr>
+          <a:xfrm xmlns:a="http://schemas.openxmlformats.org/drawingml/2006/main">
+            <a:off x="4791600" y="5454000"/>
+            <a:ext cx="3060000" cy="684000"/>
+          </a:xfrm>
+          <a:prstGeom xmlns:a="http://schemas.openxmlformats.org/drawingml/2006/main" prst="rect">
+            <a:avLst/>
+          </a:prstGeom>
+          <a:noFill xmlns:a="http://schemas.openxmlformats.org/drawingml/2006/main"/>
+        </p:spPr>
+        <p:txBody>
+          <a:bodyPr xmlns:a="http://schemas.openxmlformats.org/drawingml/2006/main"/>
+          <a:lstStyle xmlns:a="http://schemas.openxmlformats.org/drawingml/2006/main"/>
+          <a:p xmlns:a="http://schemas.openxmlformats.org/drawingml/2006/main">
+            <a:r>
+              <a:rPr lang="en-US" sz="1800">
+                <a:solidFill>
+                  <a:srgbClr val="2B3A4E"/>
+                </a:solidFill>
+                <a:latin typeface="Calibri"/>
+                <a:ea typeface="Microsoft YaHei"/>
+              </a:rPr>
+              <a:t>每一步的进度都写成 issue 评论，人随时能接管</a:t>
+            </a:r>
+          </a:p>
+        </p:txBody>
+      </p:sp>
+      <p:sp>
+        <p:nvSpPr>
+          <p:cNvPr id="100062" name="TextBox 29"/>
+          <p:cNvSpPr/>
+          <p:nvPr/>
+        </p:nvSpPr>
+        <p:spPr>
+          <a:xfrm xmlns:a="http://schemas.openxmlformats.org/drawingml/2006/main">
+            <a:off x="8143200" y="5526000"/>
+            <a:ext cx="93600" cy="93600"/>
+          </a:xfrm>
+          <a:prstGeom xmlns:a="http://schemas.openxmlformats.org/drawingml/2006/main" prst="rect">
+            <a:avLst/>
+          </a:prstGeom>
+          <a:solidFill xmlns:a="http://schemas.openxmlformats.org/drawingml/2006/main">
+            <a:srgbClr val="02C39A"/>
+          </a:solidFill>
+          <a:ln xmlns:a="http://schemas.openxmlformats.org/drawingml/2006/main">
+            <a:noFill/>
+          </a:ln>
+        </p:spPr>
+        <p:txBody>
+          <a:bodyPr xmlns:a="http://schemas.openxmlformats.org/drawingml/2006/main"/>
+          <a:lstStyle xmlns:a="http://schemas.openxmlformats.org/drawingml/2006/main"/>
+          <a:p xmlns:a="http://schemas.openxmlformats.org/drawingml/2006/main"/>
+        </p:txBody>
+      </p:sp>
+      <p:sp>
+        <p:nvSpPr>
+          <p:cNvPr id="100063" name="TextBox 30"/>
+          <p:cNvSpPr txBox="1"/>
+          <p:nvPr/>
+        </p:nvSpPr>
+        <p:spPr>
+          <a:xfrm xmlns:a="http://schemas.openxmlformats.org/drawingml/2006/main">
+            <a:off x="8341200" y="5454000"/>
+            <a:ext cx="3060000" cy="684000"/>
+          </a:xfrm>
+          <a:prstGeom xmlns:a="http://schemas.openxmlformats.org/drawingml/2006/main" prst="rect">
+            <a:avLst/>
+          </a:prstGeom>
+          <a:noFill xmlns:a="http://schemas.openxmlformats.org/drawingml/2006/main"/>
+        </p:spPr>
+        <p:txBody>
+          <a:bodyPr xmlns:a="http://schemas.openxmlformats.org/drawingml/2006/main"/>
+          <a:lstStyle xmlns:a="http://schemas.openxmlformats.org/drawingml/2006/main"/>
+          <a:p xmlns:a="http://schemas.openxmlformats.org/drawingml/2006/main">
+            <a:r>
+              <a:rPr lang="en-US" sz="1800">
+                <a:solidFill>
+                  <a:srgbClr val="2B3A4E"/>
+                </a:solidFill>
+                <a:latin typeface="Calibri"/>
+                <a:ea typeface="Microsoft YaHei"/>
+              </a:rPr>
+              <a:t>提交前先跑这个仓库自己的 verify_command</a:t>
+            </a:r>
+          </a:p>
+        </p:txBody>
+      </p:sp>
+      <p:sp>
+        <p:nvSpPr>
+          <p:cNvPr id="100009" name="Band"/>
+          <p:cNvSpPr/>
+          <p:nvPr/>
+        </p:nvSpPr>
+        <p:spPr>
+          <a:xfrm xmlns:a="http://schemas.openxmlformats.org/drawingml/2006/main">
+            <a:off x="0" y="0"/>
+            <a:ext cx="198000" cy="6858000"/>
+          </a:xfrm>
+          <a:prstGeom xmlns:a="http://schemas.openxmlformats.org/drawingml/2006/main" prst="rect">
+            <a:avLst/>
+          </a:prstGeom>
+          <a:solidFill xmlns:a="http://schemas.openxmlformats.org/drawingml/2006/main">
+            <a:srgbClr val="02C39A"/>
+          </a:solidFill>
+          <a:ln xmlns:a="http://schemas.openxmlformats.org/drawingml/2006/main">
+            <a:noFill/>
+          </a:ln>
+        </p:spPr>
+        <p:txBody>
+          <a:bodyPr xmlns:a="http://schemas.openxmlformats.org/drawingml/2006/main"/>
+          <a:lstStyle xmlns:a="http://schemas.openxmlformats.org/drawingml/2006/main"/>
+          <a:p xmlns:a="http://schemas.openxmlformats.org/drawingml/2006/main"/>
+        </p:txBody>
+      </p:sp>
     </p:spTree>
   </p:cSld>
 </p:sld>

--- a/loop-on-issue-intro.pptx
+++ b/loop-on-issue-intro.pptx
@@ -2130,7 +2130,7 @@
         </p:nvSpPr>
         <p:spPr>
           <a:xfrm xmlns:a="http://schemas.openxmlformats.org/drawingml/2006/main">
-            <a:off x="1044000" y="5526000"/>
+            <a:off x="1044000" y="5544000"/>
             <a:ext cx="93600" cy="93600"/>
           </a:xfrm>
           <a:prstGeom xmlns:a="http://schemas.openxmlformats.org/drawingml/2006/main" prst="rect">
@@ -2157,8 +2157,8 @@
         </p:nvSpPr>
         <p:spPr>
           <a:xfrm xmlns:a="http://schemas.openxmlformats.org/drawingml/2006/main">
-            <a:off x="1242000" y="5454000"/>
-            <a:ext cx="3060000" cy="684000"/>
+            <a:off x="1242000" y="5472000"/>
+            <a:ext cx="3060000" cy="648000"/>
           </a:xfrm>
           <a:prstGeom xmlns:a="http://schemas.openxmlformats.org/drawingml/2006/main" prst="rect">
             <a:avLst/>
@@ -2177,7 +2177,7 @@
                 <a:latin typeface="Calibri"/>
                 <a:ea typeface="Microsoft YaHei"/>
               </a:rPr>
-              <a:t>每个 issue 一个独立 worktree，默认最多 2 个并行</a:t>
+              <a:t>每个 issue 独占一个 worktree</a:t>
             </a:r>
           </a:p>
         </p:txBody>
@@ -2190,7 +2190,7 @@
         </p:nvSpPr>
         <p:spPr>
           <a:xfrm xmlns:a="http://schemas.openxmlformats.org/drawingml/2006/main">
-            <a:off x="4593600" y="5526000"/>
+            <a:off x="4593600" y="5544000"/>
             <a:ext cx="93600" cy="93600"/>
           </a:xfrm>
           <a:prstGeom xmlns:a="http://schemas.openxmlformats.org/drawingml/2006/main" prst="rect">
@@ -2217,8 +2217,8 @@
         </p:nvSpPr>
         <p:spPr>
           <a:xfrm xmlns:a="http://schemas.openxmlformats.org/drawingml/2006/main">
-            <a:off x="4791600" y="5454000"/>
-            <a:ext cx="3060000" cy="684000"/>
+            <a:off x="4791600" y="5472000"/>
+            <a:ext cx="3060000" cy="648000"/>
           </a:xfrm>
           <a:prstGeom xmlns:a="http://schemas.openxmlformats.org/drawingml/2006/main" prst="rect">
             <a:avLst/>
@@ -2250,7 +2250,7 @@
         </p:nvSpPr>
         <p:spPr>
           <a:xfrm xmlns:a="http://schemas.openxmlformats.org/drawingml/2006/main">
-            <a:off x="8143200" y="5526000"/>
+            <a:off x="8143200" y="5544000"/>
             <a:ext cx="93600" cy="93600"/>
           </a:xfrm>
           <a:prstGeom xmlns:a="http://schemas.openxmlformats.org/drawingml/2006/main" prst="rect">
@@ -2277,8 +2277,8 @@
         </p:nvSpPr>
         <p:spPr>
           <a:xfrm xmlns:a="http://schemas.openxmlformats.org/drawingml/2006/main">
-            <a:off x="8341200" y="5454000"/>
-            <a:ext cx="3060000" cy="684000"/>
+            <a:off x="8341200" y="5472000"/>
+            <a:ext cx="3060000" cy="648000"/>
           </a:xfrm>
           <a:prstGeom xmlns:a="http://schemas.openxmlformats.org/drawingml/2006/main" prst="rect">
             <a:avLst/>
